--- a/packages/knowledge-seed/deliverable-shells/target-state-v1.pptx
+++ b/packages/knowledge-seed/deliverable-shells/target-state-v1.pptx
@@ -3673,9 +3673,6 @@
           <a:bodyPr wrap="square" rtlCol="0" anchor="t"/>
           <a:lstStyle/>
           <a:p>
-            <a:pPr indent="0" marL="0">
-              <a:buNone/>
-            </a:pPr>
             <a:r>
               <a:rPr lang="en-US" sz="1100" dirty="0">
                 <a:solidFill>
@@ -3685,9 +3682,8 @@
                 <a:ea typeface="Calibri" pitchFamily="34" charset="-122"/>
                 <a:cs typeface="Calibri" pitchFamily="34" charset="-120"/>
               </a:rPr>
-              <a:t>{{findings_bullet_list}}</a:t>
-            </a:r>
-            <a:endParaRPr lang="en-US" sz="1100" dirty="0"/>
+              <a:t>{{section_target_state_findings_drivers}}</a:t>
+            </a:r>
           </a:p>
         </p:txBody>
       </p:sp>
@@ -3796,9 +3792,6 @@
           <a:bodyPr wrap="square" rtlCol="0" anchor="t"/>
           <a:lstStyle/>
           <a:p>
-            <a:pPr indent="0" marL="0">
-              <a:buNone/>
-            </a:pPr>
             <a:r>
               <a:rPr lang="en-US" sz="1100" dirty="0">
                 <a:solidFill>
@@ -3808,9 +3801,8 @@
                 <a:ea typeface="Calibri" pitchFamily="34" charset="-122"/>
                 <a:cs typeface="Calibri" pitchFamily="34" charset="-120"/>
               </a:rPr>
-              <a:t>{{risks_bullet_list}}</a:t>
-            </a:r>
-            <a:endParaRPr lang="en-US" sz="1100" dirty="0"/>
+              <a:t>{{section_target_state_risks_drivers}}</a:t>
+            </a:r>
           </a:p>
         </p:txBody>
       </p:sp>
@@ -4122,9 +4114,6 @@
           <a:bodyPr wrap="square" rtlCol="0" anchor="t"/>
           <a:lstStyle/>
           <a:p>
-            <a:pPr indent="0" marL="0">
-              <a:buNone/>
-            </a:pPr>
             <a:r>
               <a:rPr lang="en-US" sz="1200" i="1" dirty="0">
                 <a:solidFill>
@@ -4134,9 +4123,8 @@
                 <a:ea typeface="Calibri" pitchFamily="34" charset="-122"/>
                 <a:cs typeface="Calibri" pitchFamily="34" charset="-120"/>
               </a:rPr>
-              <a:t>The target architecture below reflects the recommended end state for the program. It addresses the forces on the prior slide and aligns to the business goals captured during discovery.</a:t>
-            </a:r>
-            <a:endParaRPr lang="en-US" sz="1200" dirty="0"/>
+              <a:t>{{section_target_state_narrative}}</a:t>
+            </a:r>
           </a:p>
         </p:txBody>
       </p:sp>
@@ -4220,9 +4208,6 @@
           <a:bodyPr wrap="square" rtlCol="0" anchor="t"/>
           <a:lstStyle/>
           <a:p>
-            <a:pPr indent="0" marL="0">
-              <a:buNone/>
-            </a:pPr>
             <a:r>
               <a:rPr lang="en-US" sz="1200" dirty="0">
                 <a:solidFill>
@@ -4232,9 +4217,8 @@
                 <a:ea typeface="Calibri" pitchFamily="34" charset="-122"/>
                 <a:cs typeface="Calibri" pitchFamily="34" charset="-120"/>
               </a:rPr>
-              <a:t>{{recommendations_bullet_list}}</a:t>
-            </a:r>
-            <a:endParaRPr lang="en-US" sz="1200" dirty="0"/>
+              <a:t>{{section_target_state_recommendations}}</a:t>
+            </a:r>
           </a:p>
         </p:txBody>
       </p:sp>
@@ -7161,9 +7145,6 @@
           <a:bodyPr wrap="square" rtlCol="0" anchor="t"/>
           <a:lstStyle/>
           <a:p>
-            <a:pPr indent="0" marL="0">
-              <a:buNone/>
-            </a:pPr>
             <a:r>
               <a:rPr lang="en-US" sz="1100" dirty="0">
                 <a:solidFill>
@@ -7173,9 +7154,8 @@
                 <a:ea typeface="Calibri" pitchFamily="34" charset="-122"/>
                 <a:cs typeface="Calibri" pitchFamily="34" charset="-120"/>
               </a:rPr>
-              <a:t>{{risks_bullet_list}}</a:t>
-            </a:r>
-            <a:endParaRPr lang="en-US" sz="1100" dirty="0"/>
+              <a:t>{{section_target_state_transition_risks}}</a:t>
+            </a:r>
           </a:p>
         </p:txBody>
       </p:sp>

--- a/packages/knowledge-seed/deliverable-shells/target-state-v1.pptx
+++ b/packages/knowledge-seed/deliverable-shells/target-state-v1.pptx
@@ -1695,6 +1695,10 @@
           </a:solidFill>
           <a:ln/>
         </p:spPr>
+        <p:txBody>
+          <a:bodyPr/>
+          <a:p/>
+        </p:txBody>
       </p:sp>
       <p:sp>
         <p:nvSpPr>
@@ -1981,6 +1985,10 @@
           </a:solidFill>
           <a:ln/>
         </p:spPr>
+        <p:txBody>
+          <a:bodyPr/>
+          <a:p/>
+        </p:txBody>
       </p:sp>
       <p:sp>
         <p:nvSpPr>
@@ -2001,6 +2009,10 @@
           </a:solidFill>
           <a:ln/>
         </p:spPr>
+        <p:txBody>
+          <a:bodyPr/>
+          <a:p/>
+        </p:txBody>
       </p:sp>
       <p:sp>
         <p:nvSpPr>
@@ -2065,6 +2077,10 @@
             <a:prstDash val="solid"/>
           </a:ln>
         </p:spPr>
+        <p:txBody>
+          <a:bodyPr/>
+          <a:p/>
+        </p:txBody>
       </p:sp>
       <p:sp>
         <p:nvSpPr>
@@ -2085,6 +2101,10 @@
           </a:solidFill>
           <a:ln/>
         </p:spPr>
+        <p:txBody>
+          <a:bodyPr/>
+          <a:p/>
+        </p:txBody>
       </p:sp>
       <p:sp>
         <p:nvSpPr>
@@ -2188,6 +2208,10 @@
             <a:prstDash val="solid"/>
           </a:ln>
         </p:spPr>
+        <p:txBody>
+          <a:bodyPr/>
+          <a:p/>
+        </p:txBody>
       </p:sp>
       <p:sp>
         <p:nvSpPr>
@@ -2208,6 +2232,10 @@
           </a:solidFill>
           <a:ln/>
         </p:spPr>
+        <p:txBody>
+          <a:bodyPr/>
+          <a:p/>
+        </p:txBody>
       </p:sp>
       <p:sp>
         <p:nvSpPr>
@@ -2311,6 +2339,10 @@
             <a:prstDash val="solid"/>
           </a:ln>
         </p:spPr>
+        <p:txBody>
+          <a:bodyPr/>
+          <a:p/>
+        </p:txBody>
       </p:sp>
       <p:sp>
         <p:nvSpPr>
@@ -2331,6 +2363,10 @@
           </a:solidFill>
           <a:ln/>
         </p:spPr>
+        <p:txBody>
+          <a:bodyPr/>
+          <a:p/>
+        </p:txBody>
       </p:sp>
       <p:sp>
         <p:nvSpPr>
@@ -2434,6 +2470,10 @@
             <a:prstDash val="solid"/>
           </a:ln>
         </p:spPr>
+        <p:txBody>
+          <a:bodyPr/>
+          <a:p/>
+        </p:txBody>
       </p:sp>
       <p:sp>
         <p:nvSpPr>
@@ -2454,6 +2494,10 @@
           </a:solidFill>
           <a:ln/>
         </p:spPr>
+        <p:txBody>
+          <a:bodyPr/>
+          <a:p/>
+        </p:txBody>
       </p:sp>
       <p:sp>
         <p:nvSpPr>
@@ -2557,6 +2601,10 @@
             <a:prstDash val="solid"/>
           </a:ln>
         </p:spPr>
+        <p:txBody>
+          <a:bodyPr/>
+          <a:p/>
+        </p:txBody>
       </p:sp>
       <p:sp>
         <p:nvSpPr>
@@ -2577,6 +2625,10 @@
           </a:solidFill>
           <a:ln/>
         </p:spPr>
+        <p:txBody>
+          <a:bodyPr/>
+          <a:p/>
+        </p:txBody>
       </p:sp>
       <p:sp>
         <p:nvSpPr>
@@ -2680,6 +2732,10 @@
             <a:prstDash val="solid"/>
           </a:ln>
         </p:spPr>
+        <p:txBody>
+          <a:bodyPr/>
+          <a:p/>
+        </p:txBody>
       </p:sp>
       <p:sp>
         <p:nvSpPr>
@@ -2700,6 +2756,10 @@
           </a:solidFill>
           <a:ln/>
         </p:spPr>
+        <p:txBody>
+          <a:bodyPr/>
+          <a:p/>
+        </p:txBody>
       </p:sp>
       <p:sp>
         <p:nvSpPr>
@@ -2837,6 +2897,10 @@
           </a:solidFill>
           <a:ln/>
         </p:spPr>
+        <p:txBody>
+          <a:bodyPr/>
+          <a:p/>
+        </p:txBody>
       </p:sp>
       <p:sp>
         <p:nvSpPr>
@@ -3006,6 +3070,10 @@
           </a:solidFill>
           <a:ln/>
         </p:spPr>
+        <p:txBody>
+          <a:bodyPr/>
+          <a:p/>
+        </p:txBody>
       </p:sp>
       <p:sp>
         <p:nvSpPr>
@@ -3026,6 +3094,10 @@
           </a:solidFill>
           <a:ln/>
         </p:spPr>
+        <p:txBody>
+          <a:bodyPr/>
+          <a:p/>
+        </p:txBody>
       </p:sp>
       <p:sp>
         <p:nvSpPr>
@@ -3163,6 +3235,10 @@
           </a:solidFill>
           <a:ln/>
         </p:spPr>
+        <p:txBody>
+          <a:bodyPr/>
+          <a:p/>
+        </p:txBody>
       </p:sp>
       <p:sp>
         <p:nvSpPr>
@@ -3339,6 +3415,10 @@
           </a:solidFill>
           <a:ln/>
         </p:spPr>
+        <p:txBody>
+          <a:bodyPr/>
+          <a:p/>
+        </p:txBody>
       </p:sp>
       <p:sp>
         <p:nvSpPr>
@@ -3508,6 +3588,10 @@
           </a:solidFill>
           <a:ln/>
         </p:spPr>
+        <p:txBody>
+          <a:bodyPr/>
+          <a:p/>
+        </p:txBody>
       </p:sp>
       <p:sp>
         <p:nvSpPr>
@@ -3528,6 +3612,10 @@
           </a:solidFill>
           <a:ln/>
         </p:spPr>
+        <p:txBody>
+          <a:bodyPr/>
+          <a:p/>
+        </p:txBody>
       </p:sp>
       <p:sp>
         <p:nvSpPr>
@@ -3592,6 +3680,10 @@
             <a:prstDash val="solid"/>
           </a:ln>
         </p:spPr>
+        <p:txBody>
+          <a:bodyPr/>
+          <a:p/>
+        </p:txBody>
       </p:sp>
       <p:sp>
         <p:nvSpPr>
@@ -3612,6 +3704,10 @@
           </a:solidFill>
           <a:ln/>
         </p:spPr>
+        <p:txBody>
+          <a:bodyPr/>
+          <a:p/>
+        </p:txBody>
       </p:sp>
       <p:sp>
         <p:nvSpPr>
@@ -3670,7 +3766,9 @@
           <a:ln/>
         </p:spPr>
         <p:txBody>
-          <a:bodyPr wrap="square" rtlCol="0" anchor="t"/>
+          <a:bodyPr wrap="square" rtlCol="0" anchor="t">
+            <a:normAutofit/>
+          </a:bodyPr>
           <a:lstStyle/>
           <a:p>
             <a:r>
@@ -3711,6 +3809,10 @@
             <a:prstDash val="solid"/>
           </a:ln>
         </p:spPr>
+        <p:txBody>
+          <a:bodyPr/>
+          <a:p/>
+        </p:txBody>
       </p:sp>
       <p:sp>
         <p:nvSpPr>
@@ -3731,6 +3833,10 @@
           </a:solidFill>
           <a:ln/>
         </p:spPr>
+        <p:txBody>
+          <a:bodyPr/>
+          <a:p/>
+        </p:txBody>
       </p:sp>
       <p:sp>
         <p:nvSpPr>
@@ -3789,7 +3895,9 @@
           <a:ln/>
         </p:spPr>
         <p:txBody>
-          <a:bodyPr wrap="square" rtlCol="0" anchor="t"/>
+          <a:bodyPr wrap="square" rtlCol="0" anchor="t">
+            <a:normAutofit/>
+          </a:bodyPr>
           <a:lstStyle/>
           <a:p>
             <a:r>
@@ -3825,6 +3933,10 @@
           </a:solidFill>
           <a:ln/>
         </p:spPr>
+        <p:txBody>
+          <a:bodyPr/>
+          <a:p/>
+        </p:txBody>
       </p:sp>
       <p:sp>
         <p:nvSpPr>
@@ -3994,6 +4106,10 @@
           </a:solidFill>
           <a:ln/>
         </p:spPr>
+        <p:txBody>
+          <a:bodyPr/>
+          <a:p/>
+        </p:txBody>
       </p:sp>
       <p:sp>
         <p:nvSpPr>
@@ -4014,6 +4130,10 @@
           </a:solidFill>
           <a:ln/>
         </p:spPr>
+        <p:txBody>
+          <a:bodyPr/>
+          <a:p/>
+        </p:txBody>
       </p:sp>
       <p:sp>
         <p:nvSpPr>
@@ -4111,7 +4231,9 @@
           <a:ln/>
         </p:spPr>
         <p:txBody>
-          <a:bodyPr wrap="square" rtlCol="0" anchor="t"/>
+          <a:bodyPr wrap="square" rtlCol="0" anchor="t">
+            <a:normAutofit/>
+          </a:bodyPr>
           <a:lstStyle/>
           <a:p>
             <a:r>
@@ -4186,6 +4308,10 @@
           </a:solidFill>
           <a:ln/>
         </p:spPr>
+        <p:txBody>
+          <a:bodyPr/>
+          <a:p/>
+        </p:txBody>
       </p:sp>
       <p:sp>
         <p:nvSpPr>
@@ -4205,7 +4331,9 @@
           <a:ln/>
         </p:spPr>
         <p:txBody>
-          <a:bodyPr wrap="square" rtlCol="0" anchor="t"/>
+          <a:bodyPr wrap="square" rtlCol="0" anchor="t">
+            <a:normAutofit/>
+          </a:bodyPr>
           <a:lstStyle/>
           <a:p>
             <a:r>
@@ -4241,6 +4369,10 @@
           </a:solidFill>
           <a:ln/>
         </p:spPr>
+        <p:txBody>
+          <a:bodyPr/>
+          <a:p/>
+        </p:txBody>
       </p:sp>
       <p:sp>
         <p:nvSpPr>
@@ -4410,6 +4542,10 @@
           </a:solidFill>
           <a:ln/>
         </p:spPr>
+        <p:txBody>
+          <a:bodyPr/>
+          <a:p/>
+        </p:txBody>
       </p:sp>
       <p:sp>
         <p:nvSpPr>
@@ -4430,6 +4566,10 @@
           </a:solidFill>
           <a:ln/>
         </p:spPr>
+        <p:txBody>
+          <a:bodyPr/>
+          <a:p/>
+        </p:txBody>
       </p:sp>
       <p:sp>
         <p:nvSpPr>
@@ -4494,6 +4634,10 @@
             <a:prstDash val="solid"/>
           </a:ln>
         </p:spPr>
+        <p:txBody>
+          <a:bodyPr/>
+          <a:p/>
+        </p:txBody>
       </p:sp>
       <p:sp>
         <p:nvSpPr>
@@ -4514,6 +4658,10 @@
           </a:solidFill>
           <a:ln/>
         </p:spPr>
+        <p:txBody>
+          <a:bodyPr/>
+          <a:p/>
+        </p:txBody>
       </p:sp>
       <p:sp>
         <p:nvSpPr>
@@ -4578,6 +4726,10 @@
             <a:prstDash val="solid"/>
           </a:ln>
         </p:spPr>
+        <p:txBody>
+          <a:bodyPr/>
+          <a:p/>
+        </p:txBody>
       </p:sp>
       <p:sp>
         <p:nvSpPr>
@@ -4598,6 +4750,10 @@
           </a:solidFill>
           <a:ln/>
         </p:spPr>
+        <p:txBody>
+          <a:bodyPr/>
+          <a:p/>
+        </p:txBody>
       </p:sp>
       <p:sp>
         <p:nvSpPr>
@@ -4662,6 +4818,10 @@
             <a:prstDash val="solid"/>
           </a:ln>
         </p:spPr>
+        <p:txBody>
+          <a:bodyPr/>
+          <a:p/>
+        </p:txBody>
       </p:sp>
       <p:sp>
         <p:nvSpPr>
@@ -4682,6 +4842,10 @@
           </a:solidFill>
           <a:ln/>
         </p:spPr>
+        <p:txBody>
+          <a:bodyPr/>
+          <a:p/>
+        </p:txBody>
       </p:sp>
       <p:sp>
         <p:nvSpPr>
@@ -4746,6 +4910,10 @@
             <a:prstDash val="solid"/>
           </a:ln>
         </p:spPr>
+        <p:txBody>
+          <a:bodyPr/>
+          <a:p/>
+        </p:txBody>
       </p:sp>
       <p:sp>
         <p:nvSpPr>
@@ -4766,6 +4934,10 @@
           </a:solidFill>
           <a:ln/>
         </p:spPr>
+        <p:txBody>
+          <a:bodyPr/>
+          <a:p/>
+        </p:txBody>
       </p:sp>
       <p:sp>
         <p:nvSpPr>
@@ -4830,6 +5002,10 @@
             <a:prstDash val="solid"/>
           </a:ln>
         </p:spPr>
+        <p:txBody>
+          <a:bodyPr/>
+          <a:p/>
+        </p:txBody>
       </p:sp>
       <p:sp>
         <p:nvSpPr>
@@ -4850,6 +5026,10 @@
           </a:solidFill>
           <a:ln/>
         </p:spPr>
+        <p:txBody>
+          <a:bodyPr/>
+          <a:p/>
+        </p:txBody>
       </p:sp>
       <p:sp>
         <p:nvSpPr>
@@ -4914,6 +5094,10 @@
             <a:prstDash val="solid"/>
           </a:ln>
         </p:spPr>
+        <p:txBody>
+          <a:bodyPr/>
+          <a:p/>
+        </p:txBody>
       </p:sp>
       <p:sp>
         <p:nvSpPr>
@@ -4934,6 +5118,10 @@
           </a:solidFill>
           <a:ln/>
         </p:spPr>
+        <p:txBody>
+          <a:bodyPr/>
+          <a:p/>
+        </p:txBody>
       </p:sp>
       <p:sp>
         <p:nvSpPr>
@@ -4998,6 +5186,10 @@
             <a:prstDash val="solid"/>
           </a:ln>
         </p:spPr>
+        <p:txBody>
+          <a:bodyPr/>
+          <a:p/>
+        </p:txBody>
       </p:sp>
       <p:sp>
         <p:nvSpPr>
@@ -5018,6 +5210,10 @@
           </a:solidFill>
           <a:ln/>
         </p:spPr>
+        <p:txBody>
+          <a:bodyPr/>
+          <a:p/>
+        </p:txBody>
       </p:sp>
       <p:sp>
         <p:nvSpPr>
@@ -5082,6 +5278,10 @@
             <a:prstDash val="solid"/>
           </a:ln>
         </p:spPr>
+        <p:txBody>
+          <a:bodyPr/>
+          <a:p/>
+        </p:txBody>
       </p:sp>
       <p:sp>
         <p:nvSpPr>
@@ -5102,6 +5302,10 @@
           </a:solidFill>
           <a:ln/>
         </p:spPr>
+        <p:txBody>
+          <a:bodyPr/>
+          <a:p/>
+        </p:txBody>
       </p:sp>
       <p:sp>
         <p:nvSpPr>
@@ -5166,6 +5370,10 @@
             <a:prstDash val="solid"/>
           </a:ln>
         </p:spPr>
+        <p:txBody>
+          <a:bodyPr/>
+          <a:p/>
+        </p:txBody>
       </p:sp>
       <p:sp>
         <p:nvSpPr>
@@ -5186,6 +5394,10 @@
           </a:solidFill>
           <a:ln/>
         </p:spPr>
+        <p:txBody>
+          <a:bodyPr/>
+          <a:p/>
+        </p:txBody>
       </p:sp>
       <p:sp>
         <p:nvSpPr>
@@ -5284,6 +5496,10 @@
           </a:solidFill>
           <a:ln/>
         </p:spPr>
+        <p:txBody>
+          <a:bodyPr/>
+          <a:p/>
+        </p:txBody>
       </p:sp>
       <p:sp>
         <p:nvSpPr>
@@ -5453,6 +5669,10 @@
           </a:solidFill>
           <a:ln/>
         </p:spPr>
+        <p:txBody>
+          <a:bodyPr/>
+          <a:p/>
+        </p:txBody>
       </p:sp>
       <p:sp>
         <p:nvSpPr>
@@ -5473,6 +5693,10 @@
           </a:solidFill>
           <a:ln/>
         </p:spPr>
+        <p:txBody>
+          <a:bodyPr/>
+          <a:p/>
+        </p:txBody>
       </p:sp>
       <p:sp>
         <p:nvSpPr>
@@ -5537,6 +5761,10 @@
             <a:prstDash val="solid"/>
           </a:ln>
         </p:spPr>
+        <p:txBody>
+          <a:bodyPr/>
+          <a:p/>
+        </p:txBody>
       </p:sp>
       <p:sp>
         <p:nvSpPr>
@@ -5557,6 +5785,10 @@
           </a:solidFill>
           <a:ln/>
         </p:spPr>
+        <p:txBody>
+          <a:bodyPr/>
+          <a:p/>
+        </p:txBody>
       </p:sp>
       <p:sp>
         <p:nvSpPr>
@@ -5699,6 +5931,10 @@
             <a:prstDash val="solid"/>
           </a:ln>
         </p:spPr>
+        <p:txBody>
+          <a:bodyPr/>
+          <a:p/>
+        </p:txBody>
       </p:sp>
       <p:sp>
         <p:nvSpPr>
@@ -5719,6 +5955,10 @@
           </a:solidFill>
           <a:ln/>
         </p:spPr>
+        <p:txBody>
+          <a:bodyPr/>
+          <a:p/>
+        </p:txBody>
       </p:sp>
       <p:sp>
         <p:nvSpPr>
@@ -5861,6 +6101,10 @@
             <a:prstDash val="solid"/>
           </a:ln>
         </p:spPr>
+        <p:txBody>
+          <a:bodyPr/>
+          <a:p/>
+        </p:txBody>
       </p:sp>
       <p:sp>
         <p:nvSpPr>
@@ -5881,6 +6125,10 @@
           </a:solidFill>
           <a:ln/>
         </p:spPr>
+        <p:txBody>
+          <a:bodyPr/>
+          <a:p/>
+        </p:txBody>
       </p:sp>
       <p:sp>
         <p:nvSpPr>
@@ -6018,6 +6266,10 @@
           </a:solidFill>
           <a:ln/>
         </p:spPr>
+        <p:txBody>
+          <a:bodyPr/>
+          <a:p/>
+        </p:txBody>
       </p:sp>
       <p:sp>
         <p:nvSpPr>
@@ -6187,6 +6439,10 @@
           </a:solidFill>
           <a:ln/>
         </p:spPr>
+        <p:txBody>
+          <a:bodyPr/>
+          <a:p/>
+        </p:txBody>
       </p:sp>
       <p:sp>
         <p:nvSpPr>
@@ -6207,6 +6463,10 @@
           </a:solidFill>
           <a:ln/>
         </p:spPr>
+        <p:txBody>
+          <a:bodyPr/>
+          <a:p/>
+        </p:txBody>
       </p:sp>
       <p:sp>
         <p:nvSpPr>
@@ -6310,6 +6570,10 @@
             <a:prstDash val="solid"/>
           </a:ln>
         </p:spPr>
+        <p:txBody>
+          <a:bodyPr/>
+          <a:p/>
+        </p:txBody>
       </p:sp>
       <p:sp>
         <p:nvSpPr>
@@ -6330,6 +6594,10 @@
           </a:solidFill>
           <a:ln/>
         </p:spPr>
+        <p:txBody>
+          <a:bodyPr/>
+          <a:p/>
+        </p:txBody>
       </p:sp>
       <p:sp>
         <p:nvSpPr>
@@ -6433,6 +6701,10 @@
             <a:prstDash val="solid"/>
           </a:ln>
         </p:spPr>
+        <p:txBody>
+          <a:bodyPr/>
+          <a:p/>
+        </p:txBody>
       </p:sp>
       <p:sp>
         <p:nvSpPr>
@@ -6453,6 +6725,10 @@
           </a:solidFill>
           <a:ln/>
         </p:spPr>
+        <p:txBody>
+          <a:bodyPr/>
+          <a:p/>
+        </p:txBody>
       </p:sp>
       <p:sp>
         <p:nvSpPr>
@@ -6556,6 +6832,10 @@
             <a:prstDash val="solid"/>
           </a:ln>
         </p:spPr>
+        <p:txBody>
+          <a:bodyPr/>
+          <a:p/>
+        </p:txBody>
       </p:sp>
       <p:sp>
         <p:nvSpPr>
@@ -6576,6 +6856,10 @@
           </a:solidFill>
           <a:ln/>
         </p:spPr>
+        <p:txBody>
+          <a:bodyPr/>
+          <a:p/>
+        </p:txBody>
       </p:sp>
       <p:sp>
         <p:nvSpPr>
@@ -6679,6 +6963,10 @@
             <a:prstDash val="solid"/>
           </a:ln>
         </p:spPr>
+        <p:txBody>
+          <a:bodyPr/>
+          <a:p/>
+        </p:txBody>
       </p:sp>
       <p:sp>
         <p:nvSpPr>
@@ -6699,6 +6987,10 @@
           </a:solidFill>
           <a:ln/>
         </p:spPr>
+        <p:txBody>
+          <a:bodyPr/>
+          <a:p/>
+        </p:txBody>
       </p:sp>
       <p:sp>
         <p:nvSpPr>
@@ -6797,6 +7089,10 @@
           </a:solidFill>
           <a:ln/>
         </p:spPr>
+        <p:txBody>
+          <a:bodyPr/>
+          <a:p/>
+        </p:txBody>
       </p:sp>
       <p:sp>
         <p:nvSpPr>
@@ -6966,6 +7262,10 @@
           </a:solidFill>
           <a:ln/>
         </p:spPr>
+        <p:txBody>
+          <a:bodyPr/>
+          <a:p/>
+        </p:txBody>
       </p:sp>
       <p:sp>
         <p:nvSpPr>
@@ -6986,6 +7286,10 @@
           </a:solidFill>
           <a:ln/>
         </p:spPr>
+        <p:txBody>
+          <a:bodyPr/>
+          <a:p/>
+        </p:txBody>
       </p:sp>
       <p:sp>
         <p:nvSpPr>
@@ -7084,6 +7388,10 @@
           </a:solidFill>
           <a:ln/>
         </p:spPr>
+        <p:txBody>
+          <a:bodyPr/>
+          <a:p/>
+        </p:txBody>
       </p:sp>
       <p:sp>
         <p:nvSpPr>
@@ -7142,7 +7450,9 @@
           <a:ln/>
         </p:spPr>
         <p:txBody>
-          <a:bodyPr wrap="square" rtlCol="0" anchor="t"/>
+          <a:bodyPr wrap="square" rtlCol="0" anchor="t">
+            <a:normAutofit/>
+          </a:bodyPr>
           <a:lstStyle/>
           <a:p>
             <a:r>
@@ -7178,6 +7488,10 @@
           </a:solidFill>
           <a:ln/>
         </p:spPr>
+        <p:txBody>
+          <a:bodyPr/>
+          <a:p/>
+        </p:txBody>
       </p:sp>
       <p:sp>
         <p:nvSpPr>
@@ -7347,6 +7661,10 @@
           </a:solidFill>
           <a:ln/>
         </p:spPr>
+        <p:txBody>
+          <a:bodyPr/>
+          <a:p/>
+        </p:txBody>
       </p:sp>
       <p:sp>
         <p:nvSpPr>
@@ -7367,6 +7685,10 @@
           </a:solidFill>
           <a:ln/>
         </p:spPr>
+        <p:txBody>
+          <a:bodyPr/>
+          <a:p/>
+        </p:txBody>
       </p:sp>
       <p:sp>
         <p:nvSpPr>
@@ -7431,6 +7753,10 @@
             <a:prstDash val="solid"/>
           </a:ln>
         </p:spPr>
+        <p:txBody>
+          <a:bodyPr/>
+          <a:p/>
+        </p:txBody>
       </p:sp>
       <p:sp>
         <p:nvSpPr>
@@ -7451,6 +7777,10 @@
           </a:solidFill>
           <a:ln/>
         </p:spPr>
+        <p:txBody>
+          <a:bodyPr/>
+          <a:p/>
+        </p:txBody>
       </p:sp>
       <p:sp>
         <p:nvSpPr>
@@ -7471,6 +7801,10 @@
           </a:solidFill>
           <a:ln/>
         </p:spPr>
+        <p:txBody>
+          <a:bodyPr/>
+          <a:p/>
+        </p:txBody>
       </p:sp>
       <p:sp>
         <p:nvSpPr>
@@ -7569,6 +7903,10 @@
           </a:solidFill>
           <a:ln/>
         </p:spPr>
+        <p:txBody>
+          <a:bodyPr/>
+          <a:p/>
+        </p:txBody>
       </p:sp>
       <p:sp>
         <p:nvSpPr>
@@ -7667,6 +8005,10 @@
           </a:solidFill>
           <a:ln/>
         </p:spPr>
+        <p:txBody>
+          <a:bodyPr/>
+          <a:p/>
+        </p:txBody>
       </p:sp>
       <p:sp>
         <p:nvSpPr>
@@ -7765,6 +8107,10 @@
           </a:solidFill>
           <a:ln/>
         </p:spPr>
+        <p:txBody>
+          <a:bodyPr/>
+          <a:p/>
+        </p:txBody>
       </p:sp>
       <p:sp>
         <p:nvSpPr>
@@ -7863,6 +8209,10 @@
           </a:solidFill>
           <a:ln/>
         </p:spPr>
+        <p:txBody>
+          <a:bodyPr/>
+          <a:p/>
+        </p:txBody>
       </p:sp>
       <p:sp>
         <p:nvSpPr>
